--- a/Model_Benchmark/rngd-npu/bench_prebuilt_vs_custom/prebuilt-vs-custom.pptx
+++ b/Model_Benchmark/rngd-npu/bench_prebuilt_vs_custom/prebuilt-vs-custom.pptx
@@ -3430,7 +3430,7 @@
                 <a:ea typeface="맑은 고딕"/>
                 <a:cs typeface="맑은 고딕"/>
               </a:rPr>
-              <a:t>사라진 설정 키가 원인인가</a:t>
+              <a:t>원인 검증</a:t>
             </a:r>
           </a:p>
         </p:txBody>
@@ -4996,7 +4996,7 @@
                 <a:ea typeface="맑은 고딕"/>
                 <a:cs typeface="맑은 고딕"/>
               </a:rPr>
-              <a:t>무엇과 무엇을 비교했나</a:t>
+              <a:t>비교 대상</a:t>
             </a:r>
           </a:p>
         </p:txBody>
@@ -8094,7 +8094,7 @@
                 <a:ea typeface="맑은 고딕"/>
                 <a:cs typeface="맑은 고딕"/>
               </a:rPr>
-              <a:t>무엇을 쟀나</a:t>
+              <a:t>측정 항목</a:t>
             </a:r>
           </a:p>
         </p:txBody>
